--- a/STARLAB_Slide_Decks_All/02_From_Topic_to_Research_Question_2.0.pptx
+++ b/STARLAB_Slide_Decks_All/02_From_Topic_to_Research_Question_2.0.pptx
@@ -2,38 +2,38 @@
 <file path=ppt/presentation.xml><?xml version="1.0" encoding="utf-8"?>
 <p:presentation xmlns:p="http://schemas.openxmlformats.org/presentationml/2006/main" embedTrueTypeFonts="1" saveSubsetFonts="0">
   <p:sldMasterIdLst>
-    <p:sldMasterId xmlns:r="http://schemas.openxmlformats.org/officeDocument/2006/relationships" id="2147483648" r:id="R8b1130aa2a37433e"/>
+    <p:sldMasterId xmlns:r="http://schemas.openxmlformats.org/officeDocument/2006/relationships" id="2147483648" r:id="R28f172f24d924a44"/>
   </p:sldMasterIdLst>
   <p:notesMasterIdLst>
-    <p:notesMasterId xmlns:r="http://schemas.openxmlformats.org/officeDocument/2006/relationships" r:id="R41d3c515a45d4906"/>
+    <p:notesMasterId xmlns:r="http://schemas.openxmlformats.org/officeDocument/2006/relationships" r:id="R355c02cdb10a4ba9"/>
   </p:notesMasterIdLst>
   <p:sldIdLst>
-    <p:sldId xmlns:r="http://schemas.openxmlformats.org/officeDocument/2006/relationships" id="256" r:id="Ra947414afb5c4131"/>
-    <p:sldId xmlns:r="http://schemas.openxmlformats.org/officeDocument/2006/relationships" id="257" r:id="Rf558730e82b14d8a"/>
-    <p:sldId xmlns:r="http://schemas.openxmlformats.org/officeDocument/2006/relationships" id="258" r:id="R73c3252898814041"/>
-    <p:sldId xmlns:r="http://schemas.openxmlformats.org/officeDocument/2006/relationships" id="259" r:id="R1d2ad5cfcc374e06"/>
-    <p:sldId xmlns:r="http://schemas.openxmlformats.org/officeDocument/2006/relationships" id="260" r:id="Rc457b9a853834708"/>
-    <p:sldId xmlns:r="http://schemas.openxmlformats.org/officeDocument/2006/relationships" id="261" r:id="Rcc47ea23b57a4760"/>
-    <p:sldId xmlns:r="http://schemas.openxmlformats.org/officeDocument/2006/relationships" id="262" r:id="R63033d397caa4b5c"/>
-    <p:sldId xmlns:r="http://schemas.openxmlformats.org/officeDocument/2006/relationships" id="263" r:id="Rc36a0331818643b8"/>
-    <p:sldId xmlns:r="http://schemas.openxmlformats.org/officeDocument/2006/relationships" id="264" r:id="R95df90b057eb4e3a"/>
-    <p:sldId xmlns:r="http://schemas.openxmlformats.org/officeDocument/2006/relationships" id="265" r:id="R6b7751e456bb4e80"/>
-    <p:sldId xmlns:r="http://schemas.openxmlformats.org/officeDocument/2006/relationships" id="266" r:id="R19cf6a9a36fe46ef"/>
-    <p:sldId xmlns:r="http://schemas.openxmlformats.org/officeDocument/2006/relationships" id="267" r:id="Reb5f9dd2ea6449bf"/>
-    <p:sldId xmlns:r="http://schemas.openxmlformats.org/officeDocument/2006/relationships" id="268" r:id="R20c5010622404bd0"/>
-    <p:sldId xmlns:r="http://schemas.openxmlformats.org/officeDocument/2006/relationships" id="269" r:id="Ra73764eea82448f1"/>
-    <p:sldId xmlns:r="http://schemas.openxmlformats.org/officeDocument/2006/relationships" id="270" r:id="Rea12eb00c4b84e4f"/>
-    <p:sldId xmlns:r="http://schemas.openxmlformats.org/officeDocument/2006/relationships" id="271" r:id="R7048d384b19b4a7f"/>
-    <p:sldId xmlns:r="http://schemas.openxmlformats.org/officeDocument/2006/relationships" id="272" r:id="Rbcad612b17f34df9"/>
-    <p:sldId xmlns:r="http://schemas.openxmlformats.org/officeDocument/2006/relationships" id="273" r:id="R4f521bb738374b3f"/>
+    <p:sldId xmlns:r="http://schemas.openxmlformats.org/officeDocument/2006/relationships" id="256" r:id="R4729fab6bb974dfc"/>
+    <p:sldId xmlns:r="http://schemas.openxmlformats.org/officeDocument/2006/relationships" id="257" r:id="R823b594f36de4579"/>
+    <p:sldId xmlns:r="http://schemas.openxmlformats.org/officeDocument/2006/relationships" id="258" r:id="Re26f7f9f1e08448b"/>
+    <p:sldId xmlns:r="http://schemas.openxmlformats.org/officeDocument/2006/relationships" id="259" r:id="R3cd090a180114e37"/>
+    <p:sldId xmlns:r="http://schemas.openxmlformats.org/officeDocument/2006/relationships" id="260" r:id="R8cbc010c9f2a46de"/>
+    <p:sldId xmlns:r="http://schemas.openxmlformats.org/officeDocument/2006/relationships" id="261" r:id="Rfccce166397a44ea"/>
+    <p:sldId xmlns:r="http://schemas.openxmlformats.org/officeDocument/2006/relationships" id="262" r:id="R55fe3dfd169d483f"/>
+    <p:sldId xmlns:r="http://schemas.openxmlformats.org/officeDocument/2006/relationships" id="263" r:id="Rab3dc71d608a4695"/>
+    <p:sldId xmlns:r="http://schemas.openxmlformats.org/officeDocument/2006/relationships" id="264" r:id="Rc91b891ba9ec4065"/>
+    <p:sldId xmlns:r="http://schemas.openxmlformats.org/officeDocument/2006/relationships" id="265" r:id="Rbf8a64828c714d75"/>
+    <p:sldId xmlns:r="http://schemas.openxmlformats.org/officeDocument/2006/relationships" id="266" r:id="Rde3cc9cc4ba149eb"/>
+    <p:sldId xmlns:r="http://schemas.openxmlformats.org/officeDocument/2006/relationships" id="267" r:id="R63851de7c06a470d"/>
+    <p:sldId xmlns:r="http://schemas.openxmlformats.org/officeDocument/2006/relationships" id="268" r:id="R6680d3abdea44248"/>
+    <p:sldId xmlns:r="http://schemas.openxmlformats.org/officeDocument/2006/relationships" id="269" r:id="R4a66d506f4c342ed"/>
+    <p:sldId xmlns:r="http://schemas.openxmlformats.org/officeDocument/2006/relationships" id="270" r:id="R9ebea82687d64fa6"/>
+    <p:sldId xmlns:r="http://schemas.openxmlformats.org/officeDocument/2006/relationships" id="271" r:id="R7c63e0646ac74e07"/>
+    <p:sldId xmlns:r="http://schemas.openxmlformats.org/officeDocument/2006/relationships" id="272" r:id="R367ac9fee61841d1"/>
+    <p:sldId xmlns:r="http://schemas.openxmlformats.org/officeDocument/2006/relationships" id="273" r:id="R3f34558365504d81"/>
   </p:sldIdLst>
   <p:sldSz cx="12191675" cy="6858000"/>
   <p:notesSz cx="6858000" cy="9144000"/>
   <p:embeddedFontLst>
     <p:embeddedFont>
       <p:font typeface="Play"/>
-      <p:regular xmlns:r="http://schemas.openxmlformats.org/officeDocument/2006/relationships" r:id="R5e104d5340844269"/>
-      <p:bold xmlns:r="http://schemas.openxmlformats.org/officeDocument/2006/relationships" r:id="R9560ff9b511c4262"/>
+      <p:regular xmlns:r="http://schemas.openxmlformats.org/officeDocument/2006/relationships" r:id="R37001438a84f4b72"/>
+      <p:bold xmlns:r="http://schemas.openxmlformats.org/officeDocument/2006/relationships" r:id="R33a6fc88b2314de0"/>
     </p:embeddedFont>
   </p:embeddedFontLst>
   <p:defaultTextStyle>
@@ -635,7 +635,7 @@
               <a:buNone/>
             </a:pPr>
             <a:r>
-              <a:t>PAIRED DECK</a:t>
+              <a:t>PAIRED PRIMARY DECK</a:t>
             </a:r>
           </a:p>
           <a:p xmlns:a="http://schemas.openxmlformats.org/drawingml/2006/main">
@@ -691,7 +691,7 @@
               <a:buNone/>
             </a:pPr>
             <a:r>
-              <a:t>Shared weekly packet for Decks 2 and 4:</a:t>
+              <a:t>- Unit 1 Student Handouts 5-8</a:t>
             </a:r>
           </a:p>
           <a:p xmlns:a="http://schemas.openxmlformats.org/drawingml/2006/main">
@@ -705,7 +705,7 @@
               <a:buNone/>
             </a:pPr>
             <a:r>
-              <a:t>- Unit 1 Student Handouts 5-8</a:t>
+              <a:t>- Unit 1 Appendices D-H</a:t>
             </a:r>
           </a:p>
           <a:p xmlns:a="http://schemas.openxmlformats.org/drawingml/2006/main">
@@ -719,7 +719,7 @@
               <a:buNone/>
             </a:pPr>
             <a:r>
-              <a:t>- Unit 1 Appendices D-H</a:t>
+              <a:t/>
             </a:r>
           </a:p>
           <a:p xmlns:a="http://schemas.openxmlformats.org/drawingml/2006/main">
@@ -733,6 +733,34 @@
               <a:buNone/>
             </a:pPr>
             <a:r>
+              <a:t>OPTIONAL / TEACHER REFERENCE</a:t>
+            </a:r>
+          </a:p>
+          <a:p xmlns:a="http://schemas.openxmlformats.org/drawingml/2006/main">
+            <a:pPr marL="0" indent="0" algn="l">
+              <a:spcBef>
+                <a:spcPts val="0"/>
+              </a:spcBef>
+              <a:spcAft>
+                <a:spcPts val="0"/>
+              </a:spcAft>
+              <a:buNone/>
+            </a:pPr>
+            <a:r>
+              <a:t>- Unit 1 Appendix I: Optional Project Card Sorting Activity</a:t>
+            </a:r>
+          </a:p>
+          <a:p xmlns:a="http://schemas.openxmlformats.org/drawingml/2006/main">
+            <a:pPr marL="0" indent="0" algn="l">
+              <a:spcBef>
+                <a:spcPts val="0"/>
+              </a:spcBef>
+              <a:spcAft>
+                <a:spcPts val="0"/>
+              </a:spcAft>
+              <a:buNone/>
+            </a:pPr>
+            <a:r>
               <a:t/>
             </a:r>
           </a:p>
@@ -747,7 +775,7 @@
               <a:buNone/>
             </a:pPr>
             <a:r>
-              <a:t>OPTIONAL / TEACHER REFERENCE</a:t>
+              <a:t>RESOURCE ALIGNMENT</a:t>
             </a:r>
           </a:p>
           <a:p xmlns:a="http://schemas.openxmlformats.org/drawingml/2006/main">
@@ -761,49 +789,7 @@
               <a:buNone/>
             </a:pPr>
             <a:r>
-              <a:t>- Unit 1 Appendix I: Optional Project Card Sorting Activity</a:t>
-            </a:r>
-          </a:p>
-          <a:p xmlns:a="http://schemas.openxmlformats.org/drawingml/2006/main">
-            <a:pPr marL="0" indent="0" algn="l">
-              <a:spcBef>
-                <a:spcPts val="0"/>
-              </a:spcBef>
-              <a:spcAft>
-                <a:spcPts val="0"/>
-              </a:spcAft>
-              <a:buNone/>
-            </a:pPr>
-            <a:r>
-              <a:t/>
-            </a:r>
-          </a:p>
-          <a:p xmlns:a="http://schemas.openxmlformats.org/drawingml/2006/main">
-            <a:pPr marL="0" indent="0" algn="l">
-              <a:spcBef>
-                <a:spcPts val="0"/>
-              </a:spcBef>
-              <a:spcAft>
-                <a:spcPts val="0"/>
-              </a:spcAft>
-              <a:buNone/>
-            </a:pPr>
-            <a:r>
-              <a:t>RESOURCE ALIGNMENT</a:t>
-            </a:r>
-          </a:p>
-          <a:p xmlns:a="http://schemas.openxmlformats.org/drawingml/2006/main">
-            <a:pPr marL="0" indent="0" algn="l">
-              <a:spcBef>
-                <a:spcPts val="0"/>
-              </a:spcBef>
-              <a:spcAft>
-                <a:spcPts val="0"/>
-              </a:spcAft>
-              <a:buNone/>
-            </a:pPr>
-            <a:r>
-              <a:t>The implementation calendar is the source of truth for week, deck, and print mappings. Use this deck after students have generated possible interest areas.</a:t>
+              <a:t>Use after students have generated possible interest areas. This deck has no separately scheduled revisit week.</a:t>
             </a:r>
           </a:p>
         </p:txBody>
@@ -2437,7 +2423,7 @@
   </p:cSld>
   <p:clrMap bg1="lt1" tx1="dk1" bg2="dk2" tx2="lt2" accent1="accent1" accent2="accent2" accent3="accent3" accent4="accent4" accent5="accent5" accent6="accent6" hlink="hlink" folHlink="folHlink"/>
   <p:sldLayoutIdLst>
-    <p:sldLayoutId xmlns:r="http://schemas.openxmlformats.org/officeDocument/2006/relationships" id="2147483649" r:id="Ra41153d7b9894b2c"/>
+    <p:sldLayoutId xmlns:r="http://schemas.openxmlformats.org/officeDocument/2006/relationships" id="2147483649" r:id="R414029c7c38543ce"/>
   </p:sldLayoutIdLst>
   <p:hf sldNum="0" hdr="0" ftr="0" dt="0"/>
   <p:txStyles>
@@ -3560,7 +3546,7 @@
           <p:nvPr/>
         </p:nvPicPr>
         <p:blipFill rotWithShape="1">
-          <a:blip xmlns:r="http://schemas.openxmlformats.org/officeDocument/2006/relationships" xmlns:a="http://schemas.openxmlformats.org/drawingml/2006/main" r:embed="R27978df787d649f5">
+          <a:blip xmlns:r="http://schemas.openxmlformats.org/officeDocument/2006/relationships" xmlns:a="http://schemas.openxmlformats.org/drawingml/2006/main" r:embed="R6d36545350db4cd6">
             <a:alphaModFix/>
           </a:blip>
           <a:srcRect xmlns:a="http://schemas.openxmlformats.org/drawingml/2006/main" l="0" t="0" r="0" b="0"/>
@@ -4288,7 +4274,7 @@
       </p:sp>
       <p:cxnSp>
         <p:nvCxnSpPr>
-          <p:cNvPr id="225" name="Google Shape;213;p12"/>
+          <p:cNvPr id="234" name="Google Shape;213;p12"/>
           <p:cNvCxnSpPr/>
           <p:nvPr/>
         </p:nvCxnSpPr>
@@ -5050,7 +5036,7 @@
       </p:sp>
       <p:cxnSp>
         <p:nvCxnSpPr>
-          <p:cNvPr id="256" name="Google Shape;230;p13"/>
+          <p:cNvPr id="265" name="Google Shape;230;p13"/>
           <p:cNvCxnSpPr/>
           <p:nvPr/>
         </p:nvCxnSpPr>
@@ -6579,7 +6565,7 @@
       </p:sp>
       <p:cxnSp>
         <p:nvCxnSpPr>
-          <p:cNvPr id="273" name="Google Shape;261;p14"/>
+          <p:cNvPr id="282" name="Google Shape;261;p14"/>
           <p:cNvCxnSpPr/>
           <p:nvPr/>
         </p:nvCxnSpPr>
@@ -7319,7 +7305,7 @@
       </p:sp>
       <p:cxnSp>
         <p:nvCxnSpPr>
-          <p:cNvPr id="289" name="Google Shape;278;p15"/>
+          <p:cNvPr id="298" name="Google Shape;278;p15"/>
           <p:cNvCxnSpPr/>
           <p:nvPr/>
         </p:nvCxnSpPr>
@@ -8070,7 +8056,7 @@
       </p:sp>
       <p:cxnSp>
         <p:nvCxnSpPr>
-          <p:cNvPr id="318" name="Google Shape;294;p16"/>
+          <p:cNvPr id="327" name="Google Shape;294;p16"/>
           <p:cNvCxnSpPr/>
           <p:nvPr/>
         </p:nvCxnSpPr>
@@ -9489,7 +9475,7 @@
       </p:sp>
       <p:cxnSp>
         <p:nvCxnSpPr>
-          <p:cNvPr id="335" name="Google Shape;323;p17"/>
+          <p:cNvPr id="344" name="Google Shape;323;p17"/>
           <p:cNvCxnSpPr/>
           <p:nvPr/>
         </p:nvCxnSpPr>
@@ -10273,7 +10259,7 @@
       </p:sp>
       <p:cxnSp>
         <p:nvCxnSpPr>
-          <p:cNvPr id="350" name="Google Shape;340;p18"/>
+          <p:cNvPr id="359" name="Google Shape;340;p18"/>
           <p:cNvCxnSpPr/>
           <p:nvPr/>
         </p:nvCxnSpPr>
@@ -10963,7 +10949,7 @@
       </p:sp>
       <p:cxnSp>
         <p:nvCxnSpPr>
-          <p:cNvPr id="367" name="Google Shape;355;p19"/>
+          <p:cNvPr id="376" name="Google Shape;355;p19"/>
           <p:cNvCxnSpPr/>
           <p:nvPr/>
         </p:nvCxnSpPr>
@@ -11747,7 +11733,7 @@
       </p:sp>
       <p:cxnSp>
         <p:nvCxnSpPr>
-          <p:cNvPr id="384" name="Google Shape;372;p20"/>
+          <p:cNvPr id="393" name="Google Shape;372;p20"/>
           <p:cNvCxnSpPr/>
           <p:nvPr/>
         </p:nvCxnSpPr>
@@ -12454,7 +12440,7 @@
       </p:sp>
       <p:cxnSp>
         <p:nvCxnSpPr>
-          <p:cNvPr id="51" name="Google Shape;36;p4"/>
+          <p:cNvPr id="60" name="Google Shape;36;p4"/>
           <p:cNvCxnSpPr/>
           <p:nvPr/>
         </p:nvCxnSpPr>
@@ -13336,7 +13322,7 @@
       </p:sp>
       <p:cxnSp>
         <p:nvCxnSpPr>
-          <p:cNvPr id="71" name="Google Shape;56;p5"/>
+          <p:cNvPr id="80" name="Google Shape;56;p5"/>
           <p:cNvCxnSpPr/>
           <p:nvPr/>
         </p:nvCxnSpPr>
@@ -14356,7 +14342,7 @@
       </p:sp>
       <p:cxnSp>
         <p:nvCxnSpPr>
-          <p:cNvPr id="100" name="Google Shape;76;p6"/>
+          <p:cNvPr id="121" name="Google Shape;76;p6"/>
           <p:cNvCxnSpPr/>
           <p:nvPr/>
         </p:nvCxnSpPr>
@@ -14560,7 +14546,7 @@
       </p:sp>
       <p:cxnSp>
         <p:nvCxnSpPr>
-          <p:cNvPr id="104" name="Google Shape;80;p6"/>
+          <p:cNvPr id="125" name="Google Shape;80;p6"/>
           <p:cNvCxnSpPr/>
           <p:nvPr/>
         </p:nvCxnSpPr>
@@ -14764,7 +14750,7 @@
       </p:sp>
       <p:cxnSp>
         <p:nvCxnSpPr>
-          <p:cNvPr id="108" name="Google Shape;84;p6"/>
+          <p:cNvPr id="129" name="Google Shape;84;p6"/>
           <p:cNvCxnSpPr/>
           <p:nvPr/>
         </p:nvCxnSpPr>
@@ -14968,7 +14954,7 @@
       </p:sp>
       <p:cxnSp>
         <p:nvCxnSpPr>
-          <p:cNvPr id="112" name="Google Shape;88;p6"/>
+          <p:cNvPr id="133" name="Google Shape;88;p6"/>
           <p:cNvCxnSpPr/>
           <p:nvPr/>
         </p:nvCxnSpPr>
@@ -15671,7 +15657,7 @@
       </p:sp>
       <p:cxnSp>
         <p:nvCxnSpPr>
-          <p:cNvPr id="126" name="Google Shape;105;p7"/>
+          <p:cNvPr id="135" name="Google Shape;105;p7"/>
           <p:cNvCxnSpPr/>
           <p:nvPr/>
         </p:nvCxnSpPr>
@@ -17095,7 +17081,7 @@
       </p:sp>
       <p:cxnSp>
         <p:nvCxnSpPr>
-          <p:cNvPr id="141" name="Google Shape;131;p8"/>
+          <p:cNvPr id="150" name="Google Shape;131;p8"/>
           <p:cNvCxnSpPr/>
           <p:nvPr/>
         </p:nvCxnSpPr>
@@ -17741,7 +17727,7 @@
       </p:sp>
       <p:cxnSp>
         <p:nvCxnSpPr>
-          <p:cNvPr id="167" name="Google Shape;146;p9"/>
+          <p:cNvPr id="176" name="Google Shape;146;p9"/>
           <p:cNvCxnSpPr/>
           <p:nvPr/>
         </p:nvCxnSpPr>
@@ -18981,7 +18967,7 @@
       </p:sp>
       <p:cxnSp>
         <p:nvCxnSpPr>
-          <p:cNvPr id="188" name="Google Shape;172;p10"/>
+          <p:cNvPr id="201" name="Google Shape;172;p10"/>
           <p:cNvCxnSpPr/>
           <p:nvPr/>
         </p:nvCxnSpPr>
@@ -19320,7 +19306,7 @@
       </p:sp>
       <p:cxnSp>
         <p:nvCxnSpPr>
-          <p:cNvPr id="192" name="Google Shape;176;p10"/>
+          <p:cNvPr id="205" name="Google Shape;176;p10"/>
           <p:cNvCxnSpPr/>
           <p:nvPr/>
         </p:nvCxnSpPr>
@@ -20158,7 +20144,7 @@
       </p:sp>
       <p:cxnSp>
         <p:nvCxnSpPr>
-          <p:cNvPr id="208" name="Google Shape;193;p11"/>
+          <p:cNvPr id="217" name="Google Shape;193;p11"/>
           <p:cNvCxnSpPr/>
           <p:nvPr/>
         </p:nvCxnSpPr>
